--- a/Crypto/Crypto Analysis Report.pptx
+++ b/Crypto/Crypto Analysis Report.pptx
@@ -262,7 +262,7 @@
           <a:p>
             <a:fld id="{37A2730A-859E-B540-ADF3-E97069AD1FDB}" type="datetimeFigureOut">
               <a:rPr lang="en-US" smtClean="0"/>
-              <a:t>11/8/2024</a:t>
+              <a:t>11/30/2024</a:t>
             </a:fld>
             <a:endParaRPr lang="en-US"/>
           </a:p>
@@ -460,7 +460,7 @@
           <a:p>
             <a:fld id="{37A2730A-859E-B540-ADF3-E97069AD1FDB}" type="datetimeFigureOut">
               <a:rPr lang="en-US" smtClean="0"/>
-              <a:t>11/8/2024</a:t>
+              <a:t>11/30/2024</a:t>
             </a:fld>
             <a:endParaRPr lang="en-US"/>
           </a:p>
@@ -668,7 +668,7 @@
           <a:p>
             <a:fld id="{37A2730A-859E-B540-ADF3-E97069AD1FDB}" type="datetimeFigureOut">
               <a:rPr lang="en-US" smtClean="0"/>
-              <a:t>11/8/2024</a:t>
+              <a:t>11/30/2024</a:t>
             </a:fld>
             <a:endParaRPr lang="en-US"/>
           </a:p>
@@ -866,7 +866,7 @@
           <a:p>
             <a:fld id="{37A2730A-859E-B540-ADF3-E97069AD1FDB}" type="datetimeFigureOut">
               <a:rPr lang="en-US" smtClean="0"/>
-              <a:t>11/8/2024</a:t>
+              <a:t>11/30/2024</a:t>
             </a:fld>
             <a:endParaRPr lang="en-US"/>
           </a:p>
@@ -1141,7 +1141,7 @@
           <a:p>
             <a:fld id="{37A2730A-859E-B540-ADF3-E97069AD1FDB}" type="datetimeFigureOut">
               <a:rPr lang="en-US" smtClean="0"/>
-              <a:t>11/8/2024</a:t>
+              <a:t>11/30/2024</a:t>
             </a:fld>
             <a:endParaRPr lang="en-US"/>
           </a:p>
@@ -1406,7 +1406,7 @@
           <a:p>
             <a:fld id="{37A2730A-859E-B540-ADF3-E97069AD1FDB}" type="datetimeFigureOut">
               <a:rPr lang="en-US" smtClean="0"/>
-              <a:t>11/8/2024</a:t>
+              <a:t>11/30/2024</a:t>
             </a:fld>
             <a:endParaRPr lang="en-US"/>
           </a:p>
@@ -1818,7 +1818,7 @@
           <a:p>
             <a:fld id="{37A2730A-859E-B540-ADF3-E97069AD1FDB}" type="datetimeFigureOut">
               <a:rPr lang="en-US" smtClean="0"/>
-              <a:t>11/8/2024</a:t>
+              <a:t>11/30/2024</a:t>
             </a:fld>
             <a:endParaRPr lang="en-US"/>
           </a:p>
@@ -1959,7 +1959,7 @@
           <a:p>
             <a:fld id="{37A2730A-859E-B540-ADF3-E97069AD1FDB}" type="datetimeFigureOut">
               <a:rPr lang="en-US" smtClean="0"/>
-              <a:t>11/8/2024</a:t>
+              <a:t>11/30/2024</a:t>
             </a:fld>
             <a:endParaRPr lang="en-US"/>
           </a:p>
@@ -2072,7 +2072,7 @@
           <a:p>
             <a:fld id="{37A2730A-859E-B540-ADF3-E97069AD1FDB}" type="datetimeFigureOut">
               <a:rPr lang="en-US" smtClean="0"/>
-              <a:t>11/8/2024</a:t>
+              <a:t>11/30/2024</a:t>
             </a:fld>
             <a:endParaRPr lang="en-US"/>
           </a:p>
@@ -2383,7 +2383,7 @@
           <a:p>
             <a:fld id="{37A2730A-859E-B540-ADF3-E97069AD1FDB}" type="datetimeFigureOut">
               <a:rPr lang="en-US" smtClean="0"/>
-              <a:t>11/8/2024</a:t>
+              <a:t>11/30/2024</a:t>
             </a:fld>
             <a:endParaRPr lang="en-US"/>
           </a:p>
@@ -2671,7 +2671,7 @@
           <a:p>
             <a:fld id="{37A2730A-859E-B540-ADF3-E97069AD1FDB}" type="datetimeFigureOut">
               <a:rPr lang="en-US" smtClean="0"/>
-              <a:t>11/8/2024</a:t>
+              <a:t>11/30/2024</a:t>
             </a:fld>
             <a:endParaRPr lang="en-US"/>
           </a:p>
@@ -2912,7 +2912,7 @@
           <a:p>
             <a:fld id="{37A2730A-859E-B540-ADF3-E97069AD1FDB}" type="datetimeFigureOut">
               <a:rPr lang="en-US" smtClean="0"/>
-              <a:t>11/8/2024</a:t>
+              <a:t>11/30/2024</a:t>
             </a:fld>
             <a:endParaRPr lang="en-US"/>
           </a:p>
@@ -3809,23 +3809,23 @@
   <we:alternateReferences/>
   <we:properties>
     <we:property name="Microsoft.Office.CampaignId" value="&quot;none&quot;"/>
-    <we:property name="reportUrl" value="&quot;/groups/me/reports/fa3b17a2-f01b-4631-bf17-9c23a640c6b8/95f963b3493358a94707?bookmarkGuid=1b26ded4-ecf4-4e45-9015-10339e5b055a&amp;bookmarkUsage=1&amp;ctid=fdd38e72-e446-434f-902c-a144248bfd87&amp;fromEntryPoint=export&amp;pbi_source=storytelling_addin&quot;"/>
-    <we:property name="reportState" value="&quot;CONNECTED&quot;"/>
     <we:property name="artifactViewState" value="&quot;live&quot;"/>
-    <we:property name="reportEmbeddedTime" value="&quot;2024-11-08T17:13:06.350Z&quot;"/>
+    <we:property name="backgroundColor" value="&quot;#817A6A&quot;"/>
+    <we:property name="bookmark" value="&quot;H4sIAAAAAAAAA+1bbW/bNhD+K4OAfTMGUrJenG+Jkw7F2iaLg+zDEAgnkrLZypJGUWm9wP99R8puEtt5WePESqp8ssnj8bnnyLvHkX3lcFmVGcw+wVQ4e85HUAx4oX6hTs/JmzHCIj9NXS9wmcv7QT9MKcfZotSyyCtn78rRoMZCn8uqhsw4wsG/L3oOZNkJjM27FLJK9JxSqKrIIZP/isYYp7SqxbzniG9lVigwLkcatDBuL9Ec3yME+puHOwLT8lKMBNPNKJA0DQYJCQYpTaPUE35gzKrGwCLbaGJc2+2HRa5B5riNGUtJlCZECOoSEkYJJCwc2HGZ6YVJMjv6ViqMDmOelYacfX4JOROGEAxBiapBfOV8FFDVysZxdGtiVNSKiVOR2qlcSz0zxDfmVTw8fv/p96PhH8fOHGk5UQWS1liA+iJ0PITSzkyKr0MlkCnu7JF5bweAzgoNWXxeZDUek3VIFzhSyXycLXJ9TftZg5SB4ospPE3JZ0ybIRmXFYoLdTCzPB9KtUy421tB/rwcYwTmYLpBFHHS94TrEQJAKfdadCqYmpW6iFlR5/qNJGElpCYNjIkoGTASEh74LgsGkec/mIazovyEYTU2xuR8WVEwineqmFrjRemr6uSfWqiZsxrgaDmBr/9cvrjPU2pcLONNsWphLJgDwb4UsagVzjbk22u7WDO9uWYDR9drsLCORIbpsFsOzfXLHyC/eWORrXBdzaZJkTk4uMQuRcYds8nxVvP/HcL0gTvXM1lz9vy5MWtidm/w9Hhu0dNfE2GAWZpyLvUC2PsVvqptMmkjgCQTd6/9ftLmc3u8V4vEo5DcR8Jd0G5XB7qTrtG6NsZqpUSu41JJtqmP7QIT6ElrkKwfnEch2R+PlRjD8s4dPesJX7YMm0o2s9Pv6nxRsrz7Ahji0LjA3NsO+JSLyOU0boCswrNC+keac1ZX2LkEPwA1nIDSrenRa0W70eZo8fmG+l5wO3t8fX08mRe2QUQ+fizhYQDEF8DcgAMRnSzoZEEnC16ZLOi68E/dhVvzX4tOGGyV3h1KA78fgBuSEKKQiiBkNEnCTho8uaGtXfIdaoQT0yxivABIVez2J69aKaxXz/ZJhk0V/n9rh5ftSWu64rojkfa31EOYVYcyTWPUInEGlY7rkluwrzmUbPuhbL2RbagtrdQKL5vmu+Hd+DRxr+Z7UNt8RUuVQpa1S9jc0Wt2JG6Aej71goSy0HcJdb3EZ5242aW4oZ246cRNJ246cfPmxM3r0BWtEGOduNmGuEkSzydhGkLEAwHEjXwfOnHTPdRpjZp5ow919pXUk6nQ0n6U+CBS/fzF5kSgj1zDjT50KscTu/OI4Rp+dNnU0ZcsgRtQWTDme63mzTGuAl2oDZ1oN4/P3sCjqp/ikeKvS1DFpVBxe7K2HUH44pfyNUrAaZ1peYprQPHWCMDVu9J86ZZSzxORTwICvjuIBtTlkXF8b3xgQR/UWiOkW/EZlwOPoLgLXDdxvQENie8x96kuKUs5IwH0aUB8nyZ972GUcornaN0XS1PgfUYI9JMgIVQw5v+YL+vuesSZCjW2CStqXZXAxAnkjV4pmzRIYe3wsELOzVmyr62U/SBR0zYbn0NWmz3NzyYcuwdCkQsJco+9/QXGUoTg339cE9zM+TEAAA==&quot;"/>
     <we:property name="creatorSessionId" value="&quot;96050a25-642d-4833-b695-2fb4cc366507&quot;"/>
+    <we:property name="creatorTenantId" value="&quot;fdd38e72-e446-434f-902c-a144248bfd87&quot;"/>
     <we:property name="creatorUserId" value="&quot;10032003E4869BB2&quot;"/>
-    <we:property name="creatorTenantId" value="&quot;fdd38e72-e446-434f-902c-a144248bfd87&quot;"/>
-    <we:property name="pageDisplayName" value="&quot;Welcome&quot;"/>
-    <we:property name="pageName" value="&quot;95f963b3493358a94707&quot;"/>
-    <we:property name="reportName" value="&quot;Crypto Analysis&quot;"/>
-    <we:property name="isVisualContainerHeaderHidden" value="false"/>
-    <we:property name="isFiltersActionButtonVisible" value="false"/>
-    <we:property name="initialStateBookmark" value="&quot;H4sIAAAAAAAAA+1bW0/jOBT+K6tI+1atnKS5lDcondWI4bIUsQ8rFJ3YTuuZNMk6DjMd1P++x047QFsKOxQamPCU2MfH37n4nK+4vbGYKIsUpicw4daedQySAsvlb7bVsbJ67OD09Oh4//woOtk/HuBwXiiRZ6W1d2MpkCOuLkVZQao14OA/Vx0L0vQMRvotgbTkHavgsswzSMV3XgvjlJIVn3Us/q1Icwla5VCB4lrtNYrjO+5t/+HijkCVuOZDTlU9CiRJ/F5M/F5iJ2Hics/XYmUtYJCtFdGqzfb9PFMgMtxGjyUkTGLCue0QEoQxxDTomXGRqrlIPB18KyRahzZPC+2VfXYNGeXMMiZIXtaIb6xjDmUljR2DexPDvJKUn/PETGVKqKn2eC1eRv3Tjyd/DvpHp9YM3XImc3RaLQHyC1dRHwozM86/9iVHTzFrj8w6OwB0kStIo8s8rTA/ViFd4UgpslE6j/Wt2y9qpBQkm09hNsWfMWzaybgsl4zLg6nx86GQi4A7nSXkL+tjtEAnpuOHISNdlzsuIQC2zdwGZQWV00LlEc2rTL2TICyZVIeBUh7GPUoCwnzPoX4vdL1Hw3CRFydoVi2jRS4XFQWt+CDziRGe17yyiv+tuJxaywYOFxP4/NfiYZOmRKtY2Jtg1UJbMAacfskjXkmcrZ1vju18zeTumjU+ul2DhXXIUwyH2bKvj1/2iPPrF4NsydfldBLnqYWDC+yCp8zSm5xuNf4/IEweOXMdHTVrz5tpsdpm546fnu5b1PT3mGtgxk0ZE2oO7OOSv8ptetJYAHHKH177I9NmM5Pey0XiSUg2OeEhaPerg72TrtG4NkYrKXmmokIKuq6P7QITqHFjkKwmzpOQ7I9Gko9gceYGL5rhi5ZhQkmnZvpDlc1LlrvJgD4OjXKMvemAzzmITEyiGsgyPMOgf6Y5p1WJnYuzA5D9MUjVmB69UrRrbo4Sn++w77lvp0+vr0935pVpEKHn+g4LfCAeB+r4DAhvaUFLC1pa8MZoQduFf+ku3Jj/WrTEYKvu3SE18Lo+OAEJIAxs7gfUjuOgpQbPbmgrh3yHHOFMN4sIDwC6KnK64zfNFFarZ/Mow7oK/7+5w+v2pBVecduRSPNb6iFMy0ORJBFykSiFUkVVwQzYt2xKun1Ttt7I1tSWRnKF1w3zw/DufJrYyPke5TZfUVImkKbNIjYP9JodkRuwXc92/dimgecQ23Fjj7bkZpfkxm7JTUtuWnLTkpt3R27eBq9oBBlryc02yE0cux4JkgBC5nMgTuh50JKb9lKnMWzmnV7q7EuhxhOuhPko8Ykn6uWLzRlHHZmCO33oXIzGZuchxTVscF3X0dcsgWtQGTD6e6365RRXgcrlmk60m+uzd3BV9UtcKf6+AJVfcxk1J2rbIYSvfijfIgWcVKkS57gGJGsMAVw+K/WXbm3bdXnoEZ+A5/TCnu2wUCveaB8Y0AeVUgjpnn1aZc8lSO58x4kdt2cHxHOp81yVNk0YJT50bZ94nh133cdRignm0aoumiTAupQQ6MZ+TGxOqfdzuoy62xFrwuXIBCyvVFkA5WeQ1XylqMMguJHDZIWM6Vwyz4bKfhLIaeuNLyGt9J76ZxOW2QOhiDkF2SBvfoGxICH49x+qtEGU8jEAAA==&quot;"/>
-    <we:property name="bookmark" value="&quot;H4sIAAAAAAAAA81W22ocRxD9lTDPi+n7RW+xLILxTUTBL0aI6u5qecxoZpjpVXYj9O+pnlEwtoIXdnEILLvT1bWnLqfmdD80qZ3HDvbv4Q6bs+YdTBHSMP3Cm03Trzbk2SulUaE02TqttK27w1jaoZ+bs4emwHSL5WM7b6GrQGT8dL1poOsu4bauMnQzbpoRp3nooWv/wtWZtsq0xcdNg7uxGyaokFcFClbYe3KnNaXAX0iKCLG093iFsaxWr7M3MkjlpdQOvLLMktu8OiyZ/atLhV7Cnw99gbanMNWGKYio0TpmwSfDY0iL79z2t91Twl//+8d+rM0puCth2NV+hC8UuCI9PlJBzjilM2fMR2OBcYbAjkcL2SSB2aUoWXJWW+8Oo8HSh5fbUqhdzyEt04lb5pwnShGNZ0vXc9uVp46E/cVunIhMoniF/DXdQx8xNQtjE84rQQ/NO4R5Oy0AF99sXA3bKeLvmJetvrRlX+dsdZ9vzj+8fv/bxfmbD03N6XIaaEZWD9jddDCXm+2Y6jzU7c/Dn+cT0io1Z+zxmiw/rD/ClL6tmxZTwunlfqnpVTv9M0t8813a/0E9VAC5JKdl5AJ54F6aoBhPePyceG+SsUkEgmTI6BPE/4jUOO3HMtzEYduXn8yo+OmMflfMSqeQmEFnIYJ2QZCiBAnH0wkYgfTD8CQVCOcSCfBBtPaORPc5FgNUMWcUAhxHj8q5eHxm0kkuuIqA4KQ0loEyx6PlGETmSjGq1mcrtQ7phNy4Au8iSCNyItnPmPUJaCIDyXg9EqxB6VTIJwh5zJZbTrlp1F5bFqN1Jwo5VxY5Cmm1SVXMnWOnQiotmdaaGzrEjFCGqyBPhGSJ+4zciiwsz2Ckx8Pj92NIrYjoZCFT/SJLRifYCcw44jgkF3mOiu4LYKgHJyYYQTPMaABSAOO4tebwIM6fYXz2+i5wXy3NHdKNqz4M2zKPEPESelwkcFwFqsX1TrMboU+Ynp6n+vu2paNgDfwRuu3SFLqENUsMSqUNHR7wX+5zzZLWdf36G16JkuRHCgAA&quot;"/>
     <we:property name="datasetId" value="&quot;34338e8d-9d84-42e0-bbdf-a2ce6ed2546d&quot;"/>
     <we:property name="embedUrl" value="&quot;/reportEmbed?reportId=fa3b17a2-f01b-4631-bf17-9c23a640c6b8&amp;config=eyJjbHVzdGVyVXJsIjoiaHR0cHM6Ly9XQUJJLVNQQUlOLUNFTlRSQUwtQS1QUklNQVJZLXJlZGlyZWN0LmFuYWx5c2lzLndpbmRvd3MubmV0IiwiZW1iZWRGZWF0dXJlcyI6eyJ1c2FnZU1ldHJpY3NWTmV4dCI6dHJ1ZX19&amp;disableSensitivityBanner=true&quot;"/>
-    <we:property name="backgroundColor" value="&quot;#817A6A&quot;"/>
+    <we:property name="initialStateBookmark" value="&quot;H4sIAAAAAAAAA+1bW0/jOBT+K6tI+1atnKS5lDcondWI4bIUsQ8rFJ3YTuuZNMk6DjMd1P++x047QFsKOxQamPCU2MfH37n4nK+4vbGYKIsUpicw4daedQySAsvlb7bVsbJ67OD09Oh4//woOtk/HuBwXiiRZ6W1d2MpkCOuLkVZQao14OA/Vx0L0vQMRvotgbTkHavgsswzSMV3XgvjlJIVn3Us/q1Icwla5VCB4lrtNYrjO+5t/+HijkCVuOZDTlU9CiRJ/F5M/F5iJ2Hics/XYmUtYJCtFdGqzfb9PFMgMtxGjyUkTGLCue0QEoQxxDTomXGRqrlIPB18KyRahzZPC+2VfXYNGeXMMiZIXtaIb6xjDmUljR2DexPDvJKUn/PETGVKqKn2eC1eRv3Tjyd/DvpHp9YM3XImc3RaLQHyC1dRHwozM86/9iVHTzFrj8w6OwB0kStIo8s8rTA/ViFd4UgpslE6j/Wt2y9qpBQkm09hNsWfMWzaybgsl4zLg6nx86GQi4A7nSXkL+tjtEAnpuOHISNdlzsuIQC2zdwGZQWV00LlEc2rTL2TICyZVIeBUh7GPUoCwnzPoX4vdL1Hw3CRFydoVi2jRS4XFQWt+CDziRGe17yyiv+tuJxaywYOFxP4/NfiYZOmRKtY2Jtg1UJbMAacfskjXkmcrZ1vju18zeTumjU+ul2DhXXIUwyH2bKvj1/2iPPrF4NsydfldBLnqYWDC+yCp8zSm5xuNf4/IEweOXMdHTVrz5tpsdpm546fnu5b1PT3mGtgxk0ZE2oO7OOSv8ptetJYAHHKH177I9NmM5Pey0XiSUg2OeEhaPerg72TrtG4NkYrKXmmokIKuq6P7QITqHFjkKwmzpOQ7I9Gko9gceYGL5rhi5ZhQkmnZvpDlc1LlrvJgD4OjXKMvemAzzmITEyiGsgyPMOgf6Y5p1WJnYuzA5D9MUjVmB69UrRrbo4Sn++w77lvp0+vr0935pVpEKHn+g4LfCAeB+r4DAhvaUFLC1pa8MZoQduFf+ku3Jj/WrTEYKvu3SE18Lo+OAEJIAxs7gfUjuOgpQbPbmgrh3yHHOFMN4sIDwC6KnK64zfNFFarZ/Mow7oK/7+5w+v2pBVecduRSPNb6iFMy0ORJBFykSiFUkVVwQzYt2xKun1Ttt7I1tSWRnKF1w3zw/DufJrYyPke5TZfUVImkKbNIjYP9JodkRuwXc92/dimgecQ23Fjj7bkZpfkxm7JTUtuWnLTkpt3R27eBq9oBBlryc02yE0cux4JkgBC5nMgTuh50JKb9lKnMWzmnV7q7EuhxhOuhPko8Ykn6uWLzRlHHZmCO33oXIzGZuchxTVscF3X0dcsgWtQGTD6e6365RRXgcrlmk60m+uzd3BV9UtcKf6+AJVfcxk1J2rbIYSvfijfIgWcVKkS57gGJGsMAVw+K/WXbm3bdXnoEZ+A5/TCnu2wUCveaB8Y0AeVUgjpnn1aZc8lSO58x4kdt2cHxHOp81yVNk0YJT50bZ94nh133cdRignm0aoumiTAupQQ6MZ+TGxOqfdzuoy62xFrwuXIBCyvVFkA5WeQ1XylqMMguJHDZIWM6Vwyz4bKfhLIaeuNLyGt9J76ZxOW2QOhiDkF2SBvfoGxICH49x+qtEGU8jEAAA==&quot;"/>
+    <we:property name="isFiltersActionButtonVisible" value="false"/>
+    <we:property name="isVisualContainerHeaderHidden" value="false"/>
+    <we:property name="pageDisplayName" value="&quot;Dashboard&quot;"/>
+    <we:property name="pageName" value="&quot;a0ff69b069f1f8f3e563&quot;"/>
+    <we:property name="reportEmbeddedTime" value="&quot;2024-11-08T17:13:06.350Z&quot;"/>
+    <we:property name="reportName" value="&quot;Crypto Analysis&quot;"/>
+    <we:property name="reportState" value="&quot;CONNECTED&quot;"/>
+    <we:property name="reportUrl" value="&quot;/groups/me/reports/fa3b17a2-f01b-4631-bf17-9c23a640c6b8/a0ff69b069f1f8f3e563?bookmarkGuid=1b26ded4-ecf4-4e45-9015-10339e5b055a&amp;bookmarkUsage=1&amp;ctid=fdd38e72-e446-434f-902c-a144248bfd87&amp;fromEntryPoint=export&amp;pbi_source=storytelling_addin&quot;"/>
   </we:properties>
   <we:bindings/>
   <we:snapshot xmlns:r="http://schemas.openxmlformats.org/officeDocument/2006/relationships"/>
@@ -3842,15 +3842,6 @@
 </file>
 
 <file path=customXml/item2.xml><?xml version="1.0" encoding="utf-8"?>
-<?mso-contentType ?>
-<FormTemplates xmlns="http://schemas.microsoft.com/sharepoint/v3/contenttype/forms">
-  <Display>DocumentLibraryForm</Display>
-  <Edit>DocumentLibraryForm</Edit>
-  <New>DocumentLibraryForm</New>
-</FormTemplates>
-</file>
-
-<file path=customXml/item3.xml><?xml version="1.0" encoding="utf-8"?>
 <ct:contentTypeSchema xmlns:ct="http://schemas.microsoft.com/office/2006/metadata/contentType" xmlns:ma="http://schemas.microsoft.com/office/2006/metadata/properties/metaAttributes" ct:_="" ma:_="" ma:contentTypeName="Document" ma:contentTypeID="0x010100CD401524DC532D42A0E0ED886331A72B" ma:contentTypeVersion="15" ma:contentTypeDescription="Create a new document." ma:contentTypeScope="" ma:versionID="aba17d7263e5a17e1efe42a3571abb41">
   <xsd:schema xmlns:xsd="http://www.w3.org/2001/XMLSchema" xmlns:xs="http://www.w3.org/2001/XMLSchema" xmlns:p="http://schemas.microsoft.com/office/2006/metadata/properties" xmlns:ns2="f577acbf-5b0b-4b4f-9948-268e97f8d3a4" xmlns:ns3="b1e4d6ee-9f6f-43f8-a618-24f3d84da28f" targetNamespace="http://schemas.microsoft.com/office/2006/metadata/properties" ma:root="true" ma:fieldsID="e4e3c9c8ed1c3d723d02c9f1cb24d19a" ns2:_="" ns3:_="">
     <xsd:import namespace="f577acbf-5b0b-4b4f-9948-268e97f8d3a4"/>
@@ -4106,6 +4097,15 @@
 </ct:contentTypeSchema>
 </file>
 
+<file path=customXml/item3.xml><?xml version="1.0" encoding="utf-8"?>
+<?mso-contentType ?>
+<FormTemplates xmlns="http://schemas.microsoft.com/sharepoint/v3/contenttype/forms">
+  <Display>DocumentLibraryForm</Display>
+  <Edit>DocumentLibraryForm</Edit>
+  <New>DocumentLibraryForm</New>
+</FormTemplates>
+</file>
+
 <file path=customXml/itemProps1.xml><?xml version="1.0" encoding="utf-8"?>
 <ds:datastoreItem xmlns:ds="http://schemas.openxmlformats.org/officeDocument/2006/customXml" ds:itemID="{617AB1FA-2F28-4684-9230-02ACEB6C0B0A}">
   <ds:schemaRefs>
@@ -4124,14 +4124,6 @@
 </file>
 
 <file path=customXml/itemProps2.xml><?xml version="1.0" encoding="utf-8"?>
-<ds:datastoreItem xmlns:ds="http://schemas.openxmlformats.org/officeDocument/2006/customXml" ds:itemID="{E21AFCC0-734A-4A90-A597-A1CB34860DCD}">
-  <ds:schemaRefs>
-    <ds:schemaRef ds:uri="http://schemas.microsoft.com/sharepoint/v3/contenttype/forms"/>
-  </ds:schemaRefs>
-</ds:datastoreItem>
-</file>
-
-<file path=customXml/itemProps3.xml><?xml version="1.0" encoding="utf-8"?>
 <ds:datastoreItem xmlns:ds="http://schemas.openxmlformats.org/officeDocument/2006/customXml" ds:itemID="{1DD29C39-1C4E-4B06-A1F4-2510F2DACF6E}">
   <ds:schemaRefs>
     <ds:schemaRef ds:uri="http://schemas.microsoft.com/office/2006/metadata/contentType"/>
@@ -4148,4 +4140,12 @@
     <ds:schemaRef ds:uri="http://schemas.microsoft.com/internal/obd"/>
   </ds:schemaRefs>
 </ds:datastoreItem>
+</file>
+
+<file path=customXml/itemProps3.xml><?xml version="1.0" encoding="utf-8"?>
+<ds:datastoreItem xmlns:ds="http://schemas.openxmlformats.org/officeDocument/2006/customXml" ds:itemID="{E21AFCC0-734A-4A90-A597-A1CB34860DCD}">
+  <ds:schemaRefs>
+    <ds:schemaRef ds:uri="http://schemas.microsoft.com/sharepoint/v3/contenttype/forms"/>
+  </ds:schemaRefs>
+</ds:datastoreItem>
 </file>
--- a/Crypto/Crypto Analysis Report.pptx
+++ b/Crypto/Crypto Analysis Report.pptx
@@ -3401,7 +3401,7 @@
                 <a:ea typeface="Calibri" panose="020F0502020204030204" pitchFamily="34" charset="0"/>
                 <a:cs typeface="Segoe UI Light" panose="020B0502040204020203" pitchFamily="34" charset="0"/>
               </a:rPr>
-              <a:t>Crypto analysis by Al Rubio</a:t>
+              <a:t>Crypto analysis by Al Rubio:</a:t>
             </a:r>
             <a:endParaRPr lang="en-IE" sz="1200" dirty="0">
               <a:effectLst/>
@@ -3842,6 +3842,15 @@
 </file>
 
 <file path=customXml/item2.xml><?xml version="1.0" encoding="utf-8"?>
+<?mso-contentType ?>
+<FormTemplates xmlns="http://schemas.microsoft.com/sharepoint/v3/contenttype/forms">
+  <Display>DocumentLibraryForm</Display>
+  <Edit>DocumentLibraryForm</Edit>
+  <New>DocumentLibraryForm</New>
+</FormTemplates>
+</file>
+
+<file path=customXml/item3.xml><?xml version="1.0" encoding="utf-8"?>
 <ct:contentTypeSchema xmlns:ct="http://schemas.microsoft.com/office/2006/metadata/contentType" xmlns:ma="http://schemas.microsoft.com/office/2006/metadata/properties/metaAttributes" ct:_="" ma:_="" ma:contentTypeName="Document" ma:contentTypeID="0x010100CD401524DC532D42A0E0ED886331A72B" ma:contentTypeVersion="15" ma:contentTypeDescription="Create a new document." ma:contentTypeScope="" ma:versionID="aba17d7263e5a17e1efe42a3571abb41">
   <xsd:schema xmlns:xsd="http://www.w3.org/2001/XMLSchema" xmlns:xs="http://www.w3.org/2001/XMLSchema" xmlns:p="http://schemas.microsoft.com/office/2006/metadata/properties" xmlns:ns2="f577acbf-5b0b-4b4f-9948-268e97f8d3a4" xmlns:ns3="b1e4d6ee-9f6f-43f8-a618-24f3d84da28f" targetNamespace="http://schemas.microsoft.com/office/2006/metadata/properties" ma:root="true" ma:fieldsID="e4e3c9c8ed1c3d723d02c9f1cb24d19a" ns2:_="" ns3:_="">
     <xsd:import namespace="f577acbf-5b0b-4b4f-9948-268e97f8d3a4"/>
@@ -4097,15 +4106,6 @@
 </ct:contentTypeSchema>
 </file>
 
-<file path=customXml/item3.xml><?xml version="1.0" encoding="utf-8"?>
-<?mso-contentType ?>
-<FormTemplates xmlns="http://schemas.microsoft.com/sharepoint/v3/contenttype/forms">
-  <Display>DocumentLibraryForm</Display>
-  <Edit>DocumentLibraryForm</Edit>
-  <New>DocumentLibraryForm</New>
-</FormTemplates>
-</file>
-
 <file path=customXml/itemProps1.xml><?xml version="1.0" encoding="utf-8"?>
 <ds:datastoreItem xmlns:ds="http://schemas.openxmlformats.org/officeDocument/2006/customXml" ds:itemID="{617AB1FA-2F28-4684-9230-02ACEB6C0B0A}">
   <ds:schemaRefs>
@@ -4124,6 +4124,14 @@
 </file>
 
 <file path=customXml/itemProps2.xml><?xml version="1.0" encoding="utf-8"?>
+<ds:datastoreItem xmlns:ds="http://schemas.openxmlformats.org/officeDocument/2006/customXml" ds:itemID="{E21AFCC0-734A-4A90-A597-A1CB34860DCD}">
+  <ds:schemaRefs>
+    <ds:schemaRef ds:uri="http://schemas.microsoft.com/sharepoint/v3/contenttype/forms"/>
+  </ds:schemaRefs>
+</ds:datastoreItem>
+</file>
+
+<file path=customXml/itemProps3.xml><?xml version="1.0" encoding="utf-8"?>
 <ds:datastoreItem xmlns:ds="http://schemas.openxmlformats.org/officeDocument/2006/customXml" ds:itemID="{1DD29C39-1C4E-4B06-A1F4-2510F2DACF6E}">
   <ds:schemaRefs>
     <ds:schemaRef ds:uri="http://schemas.microsoft.com/office/2006/metadata/contentType"/>
@@ -4140,12 +4148,4 @@
     <ds:schemaRef ds:uri="http://schemas.microsoft.com/internal/obd"/>
   </ds:schemaRefs>
 </ds:datastoreItem>
-</file>
-
-<file path=customXml/itemProps3.xml><?xml version="1.0" encoding="utf-8"?>
-<ds:datastoreItem xmlns:ds="http://schemas.openxmlformats.org/officeDocument/2006/customXml" ds:itemID="{E21AFCC0-734A-4A90-A597-A1CB34860DCD}">
-  <ds:schemaRefs>
-    <ds:schemaRef ds:uri="http://schemas.microsoft.com/sharepoint/v3/contenttype/forms"/>
-  </ds:schemaRefs>
-</ds:datastoreItem>
 </file>